--- a/毕业设计PPT/基于大模型的中小学生智能编程学习平台答辩-Google风格-详细版.pptx
+++ b/毕业设计PPT/基于大模型的中小学生智能编程学习平台答辩-Google风格-详细版.pptx
@@ -3454,7 +3454,7 @@
         </p:nvSpPr>
         <p:spPr>
           <a:xfrm>
-            <a:off x="6858000" y="1028700"/>
+            <a:off x="7370445" y="552450"/>
             <a:ext cx="4476750" cy="2381250"/>
           </a:xfrm>
           <a:prstGeom prst="roundRect">
@@ -3489,7 +3489,7 @@
         </p:nvSpPr>
         <p:spPr>
           <a:xfrm>
-            <a:off x="6858000" y="1028700"/>
+            <a:off x="7370445" y="552450"/>
             <a:ext cx="4476750" cy="66675"/>
           </a:xfrm>
           <a:prstGeom prst="rect">
@@ -3523,7 +3523,7 @@
         </p:blipFill>
         <p:spPr>
           <a:xfrm>
-            <a:off x="6972300" y="1162050"/>
+            <a:off x="7484745" y="685800"/>
             <a:ext cx="4248150" cy="2133600"/>
           </a:xfrm>
           <a:prstGeom prst="rect">
@@ -3547,7 +3547,7 @@
         </p:nvSpPr>
         <p:spPr>
           <a:xfrm>
-            <a:off x="7334250" y="4305300"/>
+            <a:off x="7846695" y="4488815"/>
             <a:ext cx="4000500" cy="1485900"/>
           </a:xfrm>
           <a:prstGeom prst="roundRect">
@@ -3582,7 +3582,7 @@
         </p:nvSpPr>
         <p:spPr>
           <a:xfrm>
-            <a:off x="7334250" y="4305300"/>
+            <a:off x="7846695" y="4488815"/>
             <a:ext cx="4000500" cy="66675"/>
           </a:xfrm>
           <a:prstGeom prst="rect">
@@ -3616,7 +3616,7 @@
         </p:blipFill>
         <p:spPr>
           <a:xfrm>
-            <a:off x="7448550" y="4438650"/>
+            <a:off x="7960995" y="4622165"/>
             <a:ext cx="3771900" cy="1238250"/>
           </a:xfrm>
           <a:prstGeom prst="rect">
@@ -3626,21 +3626,85 @@
       </p:pic>
       <p:sp>
         <p:nvSpPr>
-          <p:cNvPr id="37" name="圆角矩形 36">
-            <a:extLst>
-              <a:ext uri="{FF2B5EF4-FFF2-40B4-BE49-F238E27FC236}">
-                <a16:creationId xmlns:a16="http://schemas.microsoft.com/office/drawing/2014/main" id="{695E1363-DE01-4B0A-8662-1CBFB97B7E4A}"/>
-              </a:ext>
-            </a:extLst>
-          </p:cNvPr>
-          <p:cNvSpPr>
-            <a:spLocks noGrp="1"/>
-          </p:cNvSpPr>
-          <p:nvPr/>
-        </p:nvSpPr>
-        <p:spPr>
-          <a:xfrm>
-            <a:off x="8420100" y="3486150"/>
+          <p:cNvPr id="38" name="矩形 37">
+            <a:extLst>
+              <a:ext uri="{FF2B5EF4-FFF2-40B4-BE49-F238E27FC236}">
+                <a16:creationId xmlns:a16="http://schemas.microsoft.com/office/drawing/2014/main" id="{51978B02-4326-4288-B510-F8C1E81367F7}"/>
+              </a:ext>
+            </a:extLst>
+          </p:cNvPr>
+          <p:cNvSpPr>
+            <a:spLocks noGrp="1"/>
+          </p:cNvSpPr>
+          <p:nvPr/>
+        </p:nvSpPr>
+        <p:spPr>
+          <a:xfrm>
+            <a:off x="8515350" y="3552825"/>
+            <a:ext cx="1543050" cy="161925"/>
+          </a:xfrm>
+          <a:prstGeom prst="rect">
+            <a:avLst/>
+          </a:prstGeom>
+          <a:solidFill>
+            <a:srgbClr val="FFFFFF">
+              <a:alpha val="0"/>
+            </a:srgbClr>
+          </a:solidFill>
+          <a:ln w="0">
+            <a:solidFill>
+              <a:srgbClr val="FFFFFF">
+                <a:alpha val="0"/>
+              </a:srgbClr>
+            </a:solidFill>
+            <a:prstDash val="solid"/>
+          </a:ln>
+        </p:spPr>
+        <p:txBody>
+          <a:bodyPr lIns="0" tIns="0" rIns="0" bIns="0" anchor="t"/>
+          <a:lstStyle/>
+          <a:p>
+            <a:pPr algn="ctr">
+              <a:defRPr sz="788" b="1">
+                <a:solidFill>
+                  <a:srgbClr val="FFFFFF"/>
+                </a:solidFill>
+                <a:latin typeface="PingFang SC"/>
+                <a:ea typeface="PingFang SC"/>
+                <a:cs typeface="PingFang SC"/>
+              </a:defRPr>
+            </a:pPr>
+            <a:r>
+              <a:rPr sz="788" b="1">
+                <a:solidFill>
+                  <a:srgbClr val="FFFFFF"/>
+                </a:solidFill>
+                <a:latin typeface="PingFang SC"/>
+                <a:ea typeface="PingFang SC"/>
+                <a:cs typeface="PingFang SC"/>
+              </a:rPr>
+              <a:t>Google / Material 风格</a:t>
+            </a:r>
+          </a:p>
+        </p:txBody>
+      </p:sp>
+      <p:sp>
+        <p:nvSpPr>
+          <p:cNvPr id="39" name="圆角矩形 38">
+            <a:extLst>
+              <a:ext uri="{FF2B5EF4-FFF2-40B4-BE49-F238E27FC236}">
+                <a16:creationId xmlns:a16="http://schemas.microsoft.com/office/drawing/2014/main" id="{726B0D68-87A7-4D8F-AEBD-0085CD30305F}"/>
+              </a:ext>
+            </a:extLst>
+          </p:cNvPr>
+          <p:cNvSpPr>
+            <a:spLocks noGrp="1"/>
+          </p:cNvSpPr>
+          <p:nvPr/>
+        </p:nvSpPr>
+        <p:spPr>
+          <a:xfrm>
+            <a:off x="8942070" y="6127115"/>
             <a:ext cx="1733550" cy="285750"/>
           </a:xfrm>
           <a:prstGeom prst="roundRect">
@@ -3649,105 +3713,6 @@
             </a:avLst>
           </a:prstGeom>
           <a:solidFill>
-            <a:srgbClr val="4285F4"/>
-          </a:solidFill>
-          <a:ln w="0">
-            <a:solidFill>
-              <a:srgbClr val="4285F4"/>
-            </a:solidFill>
-            <a:prstDash val="solid"/>
-          </a:ln>
-        </p:spPr>
-      </p:sp>
-      <p:sp>
-        <p:nvSpPr>
-          <p:cNvPr id="38" name="矩形 37">
-            <a:extLst>
-              <a:ext uri="{FF2B5EF4-FFF2-40B4-BE49-F238E27FC236}">
-                <a16:creationId xmlns:a16="http://schemas.microsoft.com/office/drawing/2014/main" id="{51978B02-4326-4288-B510-F8C1E81367F7}"/>
-              </a:ext>
-            </a:extLst>
-          </p:cNvPr>
-          <p:cNvSpPr>
-            <a:spLocks noGrp="1"/>
-          </p:cNvSpPr>
-          <p:nvPr/>
-        </p:nvSpPr>
-        <p:spPr>
-          <a:xfrm>
-            <a:off x="8515350" y="3552825"/>
-            <a:ext cx="1543050" cy="161925"/>
-          </a:xfrm>
-          <a:prstGeom prst="rect">
-            <a:avLst/>
-          </a:prstGeom>
-          <a:solidFill>
-            <a:srgbClr val="FFFFFF">
-              <a:alpha val="0"/>
-            </a:srgbClr>
-          </a:solidFill>
-          <a:ln w="0">
-            <a:solidFill>
-              <a:srgbClr val="FFFFFF">
-                <a:alpha val="0"/>
-              </a:srgbClr>
-            </a:solidFill>
-            <a:prstDash val="solid"/>
-          </a:ln>
-        </p:spPr>
-        <p:txBody>
-          <a:bodyPr lIns="0" tIns="0" rIns="0" bIns="0" anchor="t"/>
-          <a:lstStyle/>
-          <a:p>
-            <a:pPr algn="ctr">
-              <a:defRPr sz="788" b="1">
-                <a:solidFill>
-                  <a:srgbClr val="FFFFFF"/>
-                </a:solidFill>
-                <a:latin typeface="PingFang SC"/>
-                <a:ea typeface="PingFang SC"/>
-                <a:cs typeface="PingFang SC"/>
-              </a:defRPr>
-            </a:pPr>
-            <a:r>
-              <a:rPr sz="788" b="1">
-                <a:solidFill>
-                  <a:srgbClr val="FFFFFF"/>
-                </a:solidFill>
-                <a:latin typeface="PingFang SC"/>
-                <a:ea typeface="PingFang SC"/>
-                <a:cs typeface="PingFang SC"/>
-              </a:rPr>
-              <a:t>Google / Material 风格</a:t>
-            </a:r>
-          </a:p>
-        </p:txBody>
-      </p:sp>
-      <p:sp>
-        <p:nvSpPr>
-          <p:cNvPr id="39" name="圆角矩形 38">
-            <a:extLst>
-              <a:ext uri="{FF2B5EF4-FFF2-40B4-BE49-F238E27FC236}">
-                <a16:creationId xmlns:a16="http://schemas.microsoft.com/office/drawing/2014/main" id="{726B0D68-87A7-4D8F-AEBD-0085CD30305F}"/>
-              </a:ext>
-            </a:extLst>
-          </p:cNvPr>
-          <p:cNvSpPr>
-            <a:spLocks noGrp="1"/>
-          </p:cNvSpPr>
-          <p:nvPr/>
-        </p:nvSpPr>
-        <p:spPr>
-          <a:xfrm>
-            <a:off x="8429625" y="5943600"/>
-            <a:ext cx="1733550" cy="285750"/>
-          </a:xfrm>
-          <a:prstGeom prst="roundRect">
-            <a:avLst>
-              <a:gd name="adj" fmla="val 26667"/>
-            </a:avLst>
-          </a:prstGeom>
-          <a:solidFill>
             <a:srgbClr val="34A853"/>
           </a:solidFill>
           <a:ln w="0">
@@ -3774,7 +3739,7 @@
         </p:nvSpPr>
         <p:spPr>
           <a:xfrm>
-            <a:off x="8524875" y="6010275"/>
+            <a:off x="9037320" y="6193790"/>
             <a:ext cx="1543050" cy="161925"/>
           </a:xfrm>
           <a:prstGeom prst="rect">
